--- a/cursos/recursos/el-mapa-de-los-finales/14-alfil-contra-caballo-con-peon.pptx
+++ b/cursos/recursos/el-mapa-de-los-finales/14-alfil-contra-caballo-con-peon.pptx
@@ -4593,7 +4593,7 @@
                 </a:solidFill>
                 <a:latin typeface="Calibri"/>
               </a:rPr>
-              <a:t>Comprobalo también con negras al mover.</a:t>
+              <a:t>Compruébalo también con negras al mover.</a:t>
             </a:r>
           </a:p>
         </p:txBody>
@@ -5161,7 +5161,7 @@
                 </a:solidFill>
                 <a:latin typeface="Calibri"/>
               </a:rPr>
-              <a:t>Comprobalo también con negras al mover.</a:t>
+              <a:t>Compruébalo también con negras al mover.</a:t>
             </a:r>
           </a:p>
         </p:txBody>
@@ -5786,7 +5786,7 @@
                 </a:solidFill>
                 <a:latin typeface="Calibri"/>
               </a:rPr>
-              <a:t>Jugá el peón de torre contra el motor con el alfil y después con el caballo.</a:t>
+              <a:t>Juega el peón de torre contra el motor con el alfil y después con el caballo.</a:t>
             </a:r>
           </a:p>
           <a:p>
@@ -5857,7 +5857,7 @@
                 </a:solidFill>
                 <a:latin typeface="Calibri"/>
               </a:rPr>
-              <a:t>•  Recorré cada línea principal hasta entender el porqué de cada jugada.</a:t>
+              <a:t>•  Recorre cada línea principal hasta entender el porqué de cada jugada.</a:t>
             </a:r>
           </a:p>
           <a:p>
@@ -5873,7 +5873,7 @@
                 </a:solidFill>
                 <a:latin typeface="Calibri"/>
               </a:rPr>
-              <a:t>•  Practicá primero las posiciones clave, después las demás.</a:t>
+              <a:t>•  Practica primero las posiciones clave, después las demás.</a:t>
             </a:r>
           </a:p>
           <a:p>
@@ -5889,7 +5889,7 @@
                 </a:solidFill>
                 <a:latin typeface="Calibri"/>
               </a:rPr>
-              <a:t>•  Anotá las reglas de cada final con tus palabras.</a:t>
+              <a:t>•  Anota las reglas de cada final con tus palabras.</a:t>
             </a:r>
           </a:p>
         </p:txBody>
